--- a/Projects/Capstone Project/1. Lightning Talk #1/capstone_lightning_talk.pptx
+++ b/Projects/Capstone Project/1. Lightning Talk #1/capstone_lightning_talk.pptx
@@ -2079,71 +2079,9 @@
                 <a:ea typeface="Calibri" pitchFamily="34" charset="-122"/>
                 <a:cs typeface="Calibri" pitchFamily="34" charset="-120"/>
               </a:rPr>
-              <a:t>NASA C-MAPSS Turbofan Degradation Simulation (FD001, Kaggle)</a:t>
-            </a:r>
-            <a:endParaRPr lang="en-US" sz="1250" dirty="0"/>
-          </a:p>
-        </p:txBody>
-      </p:sp>
-      <p:sp>
-        <p:nvSpPr>
-          <p:cNvPr id="18" name="Text 15"/>
-          <p:cNvSpPr/>
-          <p:nvPr/>
-        </p:nvSpPr>
-        <p:spPr>
-          <a:xfrm>
-            <a:off x="6675120" y="3639312"/>
-            <a:ext cx="4709160" cy="182880"/>
-          </a:xfrm>
-          <a:prstGeom prst="rect">
-            <a:avLst/>
-          </a:prstGeom>
-          <a:noFill/>
-          <a:ln/>
-        </p:spPr>
-        <p:txBody>
-          <a:bodyPr wrap="square" lIns="0" tIns="0" rIns="0" bIns="0" rtlCol="0" anchor="ctr"/>
-          <a:lstStyle/>
-          <a:p>
-            <a:pPr marL="0" indent="0">
-              <a:buNone/>
-            </a:pPr>
-            <a:r>
-              <a:rPr lang="en-US" sz="1000" b="1" kern="0" spc="80" dirty="0">
-                <a:solidFill>
-                  <a:srgbClr val="CADCFC"/>
-                </a:solidFill>
-                <a:latin typeface="Calibri" pitchFamily="34" charset="0"/>
-                <a:ea typeface="Calibri" pitchFamily="34" charset="-122"/>
-                <a:cs typeface="Calibri" pitchFamily="34" charset="-120"/>
-              </a:rPr>
-              <a:t>SIZE</a:t>
-            </a:r>
-            <a:endParaRPr lang="en-US" sz="1000" dirty="0"/>
-          </a:p>
-        </p:txBody>
-      </p:sp>
-      <p:sp>
-        <p:nvSpPr>
-          <p:cNvPr id="19" name="Text 16"/>
-          <p:cNvSpPr/>
-          <p:nvPr/>
-        </p:nvSpPr>
-        <p:spPr>
-          <a:xfrm>
-            <a:off x="6675120" y="3831336"/>
-            <a:ext cx="4709160" cy="283464"/>
-          </a:xfrm>
-          <a:prstGeom prst="rect">
-            <a:avLst/>
-          </a:prstGeom>
-          <a:noFill/>
-          <a:ln/>
-        </p:spPr>
-        <p:txBody>
-          <a:bodyPr wrap="square" lIns="0" tIns="0" rIns="0" bIns="0" rtlCol="0" anchor="ctr"/>
-          <a:lstStyle/>
+              <a:t>NASA C-MAPSS Turbofan Degradation Simulation </a:t>
+            </a:r>
+          </a:p>
           <a:p>
             <a:pPr marL="0" indent="0">
               <a:lnSpc>
@@ -2160,7 +2098,7 @@
                 <a:ea typeface="Calibri" pitchFamily="34" charset="-122"/>
                 <a:cs typeface="Calibri" pitchFamily="34" charset="-120"/>
               </a:rPr>
-              <a:t>20,631 rows  ×  26 columns (raw)</a:t>
+              <a:t>(FD001, Kaggle)</a:t>
             </a:r>
             <a:endParaRPr lang="en-US" sz="1250" dirty="0"/>
           </a:p>
@@ -2168,13 +2106,13 @@
       </p:sp>
       <p:sp>
         <p:nvSpPr>
-          <p:cNvPr id="20" name="Text 17"/>
-          <p:cNvSpPr/>
-          <p:nvPr/>
-        </p:nvSpPr>
-        <p:spPr>
-          <a:xfrm>
-            <a:off x="6675120" y="4297680"/>
+          <p:cNvPr id="18" name="Text 15"/>
+          <p:cNvSpPr/>
+          <p:nvPr/>
+        </p:nvSpPr>
+        <p:spPr>
+          <a:xfrm>
+            <a:off x="6675120" y="3639312"/>
             <a:ext cx="4709160" cy="182880"/>
           </a:xfrm>
           <a:prstGeom prst="rect">
@@ -2199,7 +2137,7 @@
                 <a:ea typeface="Calibri" pitchFamily="34" charset="-122"/>
                 <a:cs typeface="Calibri" pitchFamily="34" charset="-120"/>
               </a:rPr>
-              <a:t>MISSING VALUES</a:t>
+              <a:t>SIZE</a:t>
             </a:r>
             <a:endParaRPr lang="en-US" sz="1000" dirty="0"/>
           </a:p>
@@ -2207,13 +2145,13 @@
       </p:sp>
       <p:sp>
         <p:nvSpPr>
-          <p:cNvPr id="21" name="Text 18"/>
-          <p:cNvSpPr/>
-          <p:nvPr/>
-        </p:nvSpPr>
-        <p:spPr>
-          <a:xfrm>
-            <a:off x="6675120" y="4489704"/>
+          <p:cNvPr id="19" name="Text 16"/>
+          <p:cNvSpPr/>
+          <p:nvPr/>
+        </p:nvSpPr>
+        <p:spPr>
+          <a:xfrm>
+            <a:off x="6675120" y="3831336"/>
             <a:ext cx="4709160" cy="283464"/>
           </a:xfrm>
           <a:prstGeom prst="rect">
@@ -2241,7 +2179,7 @@
                 <a:ea typeface="Calibri" pitchFamily="34" charset="-122"/>
                 <a:cs typeface="Calibri" pitchFamily="34" charset="-120"/>
               </a:rPr>
-              <a:t>None found (0 nulls across all columns)</a:t>
+              <a:t>20,631 rows  ×  26 columns (raw)</a:t>
             </a:r>
             <a:endParaRPr lang="en-US" sz="1250" dirty="0"/>
           </a:p>
@@ -2249,13 +2187,13 @@
       </p:sp>
       <p:sp>
         <p:nvSpPr>
-          <p:cNvPr id="22" name="Text 19"/>
-          <p:cNvSpPr/>
-          <p:nvPr/>
-        </p:nvSpPr>
-        <p:spPr>
-          <a:xfrm>
-            <a:off x="6675120" y="4956048"/>
+          <p:cNvPr id="20" name="Text 17"/>
+          <p:cNvSpPr/>
+          <p:nvPr/>
+        </p:nvSpPr>
+        <p:spPr>
+          <a:xfrm>
+            <a:off x="6675120" y="4297680"/>
             <a:ext cx="4709160" cy="182880"/>
           </a:xfrm>
           <a:prstGeom prst="rect">
@@ -2280,7 +2218,7 @@
                 <a:ea typeface="Calibri" pitchFamily="34" charset="-122"/>
                 <a:cs typeface="Calibri" pitchFamily="34" charset="-120"/>
               </a:rPr>
-              <a:t>FEATURE SPLIT</a:t>
+              <a:t>MISSING VALUES</a:t>
             </a:r>
             <a:endParaRPr lang="en-US" sz="1000" dirty="0"/>
           </a:p>
@@ -2288,13 +2226,13 @@
       </p:sp>
       <p:sp>
         <p:nvSpPr>
-          <p:cNvPr id="23" name="Text 20"/>
-          <p:cNvSpPr/>
-          <p:nvPr/>
-        </p:nvSpPr>
-        <p:spPr>
-          <a:xfrm>
-            <a:off x="6675120" y="5148072"/>
+          <p:cNvPr id="21" name="Text 18"/>
+          <p:cNvSpPr/>
+          <p:nvPr/>
+        </p:nvSpPr>
+        <p:spPr>
+          <a:xfrm>
+            <a:off x="6675120" y="4489704"/>
             <a:ext cx="4709160" cy="283464"/>
           </a:xfrm>
           <a:prstGeom prst="rect">
@@ -2322,7 +2260,7 @@
                 <a:ea typeface="Calibri" pitchFamily="34" charset="-122"/>
                 <a:cs typeface="Calibri" pitchFamily="34" charset="-120"/>
               </a:rPr>
-              <a:t>31 numerical, 1 categorical (after feature engineering)</a:t>
+              <a:t>None found (0 nulls across all columns)</a:t>
             </a:r>
             <a:endParaRPr lang="en-US" sz="1250" dirty="0"/>
           </a:p>
@@ -2330,13 +2268,13 @@
       </p:sp>
       <p:sp>
         <p:nvSpPr>
-          <p:cNvPr id="24" name="Text 21"/>
-          <p:cNvSpPr/>
-          <p:nvPr/>
-        </p:nvSpPr>
-        <p:spPr>
-          <a:xfrm>
-            <a:off x="6675120" y="5614416"/>
+          <p:cNvPr id="22" name="Text 19"/>
+          <p:cNvSpPr/>
+          <p:nvPr/>
+        </p:nvSpPr>
+        <p:spPr>
+          <a:xfrm>
+            <a:off x="6675120" y="4956048"/>
             <a:ext cx="4709160" cy="182880"/>
           </a:xfrm>
           <a:prstGeom prst="rect">
@@ -2361,7 +2299,7 @@
                 <a:ea typeface="Calibri" pitchFamily="34" charset="-122"/>
                 <a:cs typeface="Calibri" pitchFamily="34" charset="-120"/>
               </a:rPr>
-              <a:t>OUTLIERS</a:t>
+              <a:t>FEATURE SPLIT</a:t>
             </a:r>
             <a:endParaRPr lang="en-US" sz="1000" dirty="0"/>
           </a:p>
@@ -2369,14 +2307,14 @@
       </p:sp>
       <p:sp>
         <p:nvSpPr>
-          <p:cNvPr id="25" name="Text 22"/>
-          <p:cNvSpPr/>
-          <p:nvPr/>
-        </p:nvSpPr>
-        <p:spPr>
-          <a:xfrm>
-            <a:off x="6675120" y="5806440"/>
-            <a:ext cx="4709160" cy="512064"/>
+          <p:cNvPr id="23" name="Text 20"/>
+          <p:cNvSpPr/>
+          <p:nvPr/>
+        </p:nvSpPr>
+        <p:spPr>
+          <a:xfrm>
+            <a:off x="6675120" y="5148072"/>
+            <a:ext cx="4709160" cy="283464"/>
           </a:xfrm>
           <a:prstGeom prst="rect">
             <a:avLst/>
@@ -2403,6 +2341,87 @@
                 <a:ea typeface="Calibri" pitchFamily="34" charset="-122"/>
                 <a:cs typeface="Calibri" pitchFamily="34" charset="-120"/>
               </a:rPr>
+              <a:t>31 numerical, 1 categorical (after feature engineering)</a:t>
+            </a:r>
+            <a:endParaRPr lang="en-US" sz="1250" dirty="0"/>
+          </a:p>
+        </p:txBody>
+      </p:sp>
+      <p:sp>
+        <p:nvSpPr>
+          <p:cNvPr id="24" name="Text 21"/>
+          <p:cNvSpPr/>
+          <p:nvPr/>
+        </p:nvSpPr>
+        <p:spPr>
+          <a:xfrm>
+            <a:off x="6675120" y="5614416"/>
+            <a:ext cx="4709160" cy="182880"/>
+          </a:xfrm>
+          <a:prstGeom prst="rect">
+            <a:avLst/>
+          </a:prstGeom>
+          <a:noFill/>
+          <a:ln/>
+        </p:spPr>
+        <p:txBody>
+          <a:bodyPr wrap="square" lIns="0" tIns="0" rIns="0" bIns="0" rtlCol="0" anchor="ctr"/>
+          <a:lstStyle/>
+          <a:p>
+            <a:pPr marL="0" indent="0">
+              <a:buNone/>
+            </a:pPr>
+            <a:r>
+              <a:rPr lang="en-US" sz="1000" b="1" kern="0" spc="80" dirty="0">
+                <a:solidFill>
+                  <a:srgbClr val="CADCFC"/>
+                </a:solidFill>
+                <a:latin typeface="Calibri" pitchFamily="34" charset="0"/>
+                <a:ea typeface="Calibri" pitchFamily="34" charset="-122"/>
+                <a:cs typeface="Calibri" pitchFamily="34" charset="-120"/>
+              </a:rPr>
+              <a:t>OUTLIERS</a:t>
+            </a:r>
+            <a:endParaRPr lang="en-US" sz="1000" dirty="0"/>
+          </a:p>
+        </p:txBody>
+      </p:sp>
+      <p:sp>
+        <p:nvSpPr>
+          <p:cNvPr id="25" name="Text 22"/>
+          <p:cNvSpPr/>
+          <p:nvPr/>
+        </p:nvSpPr>
+        <p:spPr>
+          <a:xfrm>
+            <a:off x="6675120" y="5806440"/>
+            <a:ext cx="4709160" cy="512064"/>
+          </a:xfrm>
+          <a:prstGeom prst="rect">
+            <a:avLst/>
+          </a:prstGeom>
+          <a:noFill/>
+          <a:ln/>
+        </p:spPr>
+        <p:txBody>
+          <a:bodyPr wrap="square" lIns="0" tIns="0" rIns="0" bIns="0" rtlCol="0" anchor="ctr"/>
+          <a:lstStyle/>
+          <a:p>
+            <a:pPr marL="0" indent="0">
+              <a:lnSpc>
+                <a:spcPct val="108000"/>
+              </a:lnSpc>
+              <a:buNone/>
+            </a:pPr>
+            <a:r>
+              <a:rPr lang="en-US" sz="1250" dirty="0">
+                <a:solidFill>
+                  <a:srgbClr val="FFFFFF"/>
+                </a:solidFill>
+                <a:latin typeface="Calibri" pitchFamily="34" charset="0"/>
+                <a:ea typeface="Calibri" pitchFamily="34" charset="-122"/>
+                <a:cs typeface="Calibri" pitchFamily="34" charset="-120"/>
+              </a:rPr>
               <a:t>Extreme values likely reflect valid operating states — plan to cap via a robust scaler rather than remove</a:t>
             </a:r>
             <a:endParaRPr lang="en-US" sz="1250" dirty="0"/>
@@ -2448,6 +2467,36 @@
           </a:p>
         </p:txBody>
       </p:sp>
+      <p:pic>
+        <p:nvPicPr>
+          <p:cNvPr id="28" name="Picture 27">
+            <a:extLst>
+              <a:ext uri="{FF2B5EF4-FFF2-40B4-BE49-F238E27FC236}">
+                <a16:creationId xmlns:a16="http://schemas.microsoft.com/office/drawing/2014/main" id="{B7C60B36-2CB5-99FD-6A2E-717920D02397}"/>
+              </a:ext>
+            </a:extLst>
+          </p:cNvPr>
+          <p:cNvPicPr>
+            <a:picLocks noChangeAspect="1"/>
+          </p:cNvPicPr>
+          <p:nvPr/>
+        </p:nvPicPr>
+        <p:blipFill>
+          <a:blip r:embed="rId4"/>
+          <a:stretch>
+            <a:fillRect/>
+          </a:stretch>
+        </p:blipFill>
+        <p:spPr>
+          <a:xfrm>
+            <a:off x="10021079" y="2424279"/>
+            <a:ext cx="1637522" cy="1091681"/>
+          </a:xfrm>
+          <a:prstGeom prst="rect">
+            <a:avLst/>
+          </a:prstGeom>
+        </p:spPr>
+      </p:pic>
     </p:spTree>
   </p:cSld>
   <p:clrMapOvr>
@@ -3503,6 +3552,36 @@
           </a:p>
         </p:txBody>
       </p:sp>
+      <p:pic>
+        <p:nvPicPr>
+          <p:cNvPr id="27" name="Picture 26">
+            <a:extLst>
+              <a:ext uri="{FF2B5EF4-FFF2-40B4-BE49-F238E27FC236}">
+                <a16:creationId xmlns:a16="http://schemas.microsoft.com/office/drawing/2014/main" id="{33882664-3B0E-3CD4-E669-FCBBDAE656EF}"/>
+              </a:ext>
+            </a:extLst>
+          </p:cNvPr>
+          <p:cNvPicPr>
+            <a:picLocks noChangeAspect="1"/>
+          </p:cNvPicPr>
+          <p:nvPr/>
+        </p:nvPicPr>
+        <p:blipFill>
+          <a:blip r:embed="rId4"/>
+          <a:stretch>
+            <a:fillRect/>
+          </a:stretch>
+        </p:blipFill>
+        <p:spPr>
+          <a:xfrm>
+            <a:off x="10478278" y="2441448"/>
+            <a:ext cx="1125271" cy="1125271"/>
+          </a:xfrm>
+          <a:prstGeom prst="rect">
+            <a:avLst/>
+          </a:prstGeom>
+        </p:spPr>
+      </p:pic>
     </p:spTree>
   </p:cSld>
   <p:clrMapOvr>
@@ -4189,71 +4268,9 @@
                 <a:ea typeface="Calibri" pitchFamily="34" charset="-122"/>
                 <a:cs typeface="Calibri" pitchFamily="34" charset="-120"/>
               </a:rPr>
-              <a:t>NTSB Aviation Accident Database, 1962–2023 (Kaggle)</a:t>
-            </a:r>
-            <a:endParaRPr lang="en-US" sz="1250" dirty="0"/>
-          </a:p>
-        </p:txBody>
-      </p:sp>
-      <p:sp>
-        <p:nvSpPr>
-          <p:cNvPr id="18" name="Text 15"/>
-          <p:cNvSpPr/>
-          <p:nvPr/>
-        </p:nvSpPr>
-        <p:spPr>
-          <a:xfrm>
-            <a:off x="6675120" y="3639312"/>
-            <a:ext cx="4709160" cy="182880"/>
-          </a:xfrm>
-          <a:prstGeom prst="rect">
-            <a:avLst/>
-          </a:prstGeom>
-          <a:noFill/>
-          <a:ln/>
-        </p:spPr>
-        <p:txBody>
-          <a:bodyPr wrap="square" lIns="0" tIns="0" rIns="0" bIns="0" rtlCol="0" anchor="ctr"/>
-          <a:lstStyle/>
-          <a:p>
-            <a:pPr marL="0" indent="0">
-              <a:buNone/>
-            </a:pPr>
-            <a:r>
-              <a:rPr lang="en-US" sz="1000" b="1" kern="0" spc="80" dirty="0">
-                <a:solidFill>
-                  <a:srgbClr val="CADCFC"/>
-                </a:solidFill>
-                <a:latin typeface="Calibri" pitchFamily="34" charset="0"/>
-                <a:ea typeface="Calibri" pitchFamily="34" charset="-122"/>
-                <a:cs typeface="Calibri" pitchFamily="34" charset="-120"/>
-              </a:rPr>
-              <a:t>SIZE</a:t>
-            </a:r>
-            <a:endParaRPr lang="en-US" sz="1000" dirty="0"/>
-          </a:p>
-        </p:txBody>
-      </p:sp>
-      <p:sp>
-        <p:nvSpPr>
-          <p:cNvPr id="19" name="Text 16"/>
-          <p:cNvSpPr/>
-          <p:nvPr/>
-        </p:nvSpPr>
-        <p:spPr>
-          <a:xfrm>
-            <a:off x="6675120" y="3831336"/>
-            <a:ext cx="4709160" cy="283464"/>
-          </a:xfrm>
-          <a:prstGeom prst="rect">
-            <a:avLst/>
-          </a:prstGeom>
-          <a:noFill/>
-          <a:ln/>
-        </p:spPr>
-        <p:txBody>
-          <a:bodyPr wrap="square" lIns="0" tIns="0" rIns="0" bIns="0" rtlCol="0" anchor="ctr"/>
-          <a:lstStyle/>
+              <a:t>NTSB Aviation Accident Database, 1962–2023</a:t>
+            </a:r>
+          </a:p>
           <a:p>
             <a:pPr marL="0" indent="0">
               <a:lnSpc>
@@ -4270,7 +4287,7 @@
                 <a:ea typeface="Calibri" pitchFamily="34" charset="-122"/>
                 <a:cs typeface="Calibri" pitchFamily="34" charset="-120"/>
               </a:rPr>
-              <a:t>88,889 rows × 31 columns</a:t>
+              <a:t>(Kaggle)</a:t>
             </a:r>
             <a:endParaRPr lang="en-US" sz="1250" dirty="0"/>
           </a:p>
@@ -4278,13 +4295,13 @@
       </p:sp>
       <p:sp>
         <p:nvSpPr>
-          <p:cNvPr id="20" name="Text 17"/>
-          <p:cNvSpPr/>
-          <p:nvPr/>
-        </p:nvSpPr>
-        <p:spPr>
-          <a:xfrm>
-            <a:off x="6675120" y="4297680"/>
+          <p:cNvPr id="18" name="Text 15"/>
+          <p:cNvSpPr/>
+          <p:nvPr/>
+        </p:nvSpPr>
+        <p:spPr>
+          <a:xfrm>
+            <a:off x="6675120" y="3639312"/>
             <a:ext cx="4709160" cy="182880"/>
           </a:xfrm>
           <a:prstGeom prst="rect">
@@ -4309,7 +4326,7 @@
                 <a:ea typeface="Calibri" pitchFamily="34" charset="-122"/>
                 <a:cs typeface="Calibri" pitchFamily="34" charset="-120"/>
               </a:rPr>
-              <a:t>MISSING VALUES</a:t>
+              <a:t>SIZE</a:t>
             </a:r>
             <a:endParaRPr lang="en-US" sz="1000" dirty="0"/>
           </a:p>
@@ -4317,14 +4334,14 @@
       </p:sp>
       <p:sp>
         <p:nvSpPr>
-          <p:cNvPr id="21" name="Text 18"/>
-          <p:cNvSpPr/>
-          <p:nvPr/>
-        </p:nvSpPr>
-        <p:spPr>
-          <a:xfrm>
-            <a:off x="6675120" y="4489704"/>
-            <a:ext cx="4709160" cy="512064"/>
+          <p:cNvPr id="19" name="Text 16"/>
+          <p:cNvSpPr/>
+          <p:nvPr/>
+        </p:nvSpPr>
+        <p:spPr>
+          <a:xfrm>
+            <a:off x="6675120" y="3831336"/>
+            <a:ext cx="4709160" cy="283464"/>
           </a:xfrm>
           <a:prstGeom prst="rect">
             <a:avLst/>
@@ -4351,7 +4368,7 @@
                 <a:ea typeface="Calibri" pitchFamily="34" charset="-122"/>
                 <a:cs typeface="Calibri" pitchFamily="34" charset="-120"/>
               </a:rPr>
-              <a:t>Substantial in several fields (Aircraft.Category ~64%, Schedule ~86%) — impute “Unknown” or drop sparse ID columns</a:t>
+              <a:t>88,889 rows × 31 columns</a:t>
             </a:r>
             <a:endParaRPr lang="en-US" sz="1250" dirty="0"/>
           </a:p>
@@ -4359,13 +4376,13 @@
       </p:sp>
       <p:sp>
         <p:nvSpPr>
-          <p:cNvPr id="22" name="Text 19"/>
-          <p:cNvSpPr/>
-          <p:nvPr/>
-        </p:nvSpPr>
-        <p:spPr>
-          <a:xfrm>
-            <a:off x="6675120" y="5184648"/>
+          <p:cNvPr id="20" name="Text 17"/>
+          <p:cNvSpPr/>
+          <p:nvPr/>
+        </p:nvSpPr>
+        <p:spPr>
+          <a:xfrm>
+            <a:off x="6675120" y="4297680"/>
             <a:ext cx="4709160" cy="182880"/>
           </a:xfrm>
           <a:prstGeom prst="rect">
@@ -4390,7 +4407,7 @@
                 <a:ea typeface="Calibri" pitchFamily="34" charset="-122"/>
                 <a:cs typeface="Calibri" pitchFamily="34" charset="-120"/>
               </a:rPr>
-              <a:t>FEATURE SPLIT</a:t>
+              <a:t>MISSING VALUES</a:t>
             </a:r>
             <a:endParaRPr lang="en-US" sz="1000" dirty="0"/>
           </a:p>
@@ -4398,14 +4415,14 @@
       </p:sp>
       <p:sp>
         <p:nvSpPr>
-          <p:cNvPr id="23" name="Text 20"/>
-          <p:cNvSpPr/>
-          <p:nvPr/>
-        </p:nvSpPr>
-        <p:spPr>
-          <a:xfrm>
-            <a:off x="6675120" y="5376672"/>
-            <a:ext cx="4709160" cy="283464"/>
+          <p:cNvPr id="21" name="Text 18"/>
+          <p:cNvSpPr/>
+          <p:nvPr/>
+        </p:nvSpPr>
+        <p:spPr>
+          <a:xfrm>
+            <a:off x="6675120" y="4489704"/>
+            <a:ext cx="4709160" cy="512064"/>
           </a:xfrm>
           <a:prstGeom prst="rect">
             <a:avLst/>
@@ -4432,7 +4449,7 @@
                 <a:ea typeface="Calibri" pitchFamily="34" charset="-122"/>
                 <a:cs typeface="Calibri" pitchFamily="34" charset="-120"/>
               </a:rPr>
-              <a:t>5 numerical, 26 categorical</a:t>
+              <a:t>Substantial in several fields (Aircraft.Category ~64%, Schedule ~86%) — impute “Unknown” or drop sparse ID columns</a:t>
             </a:r>
             <a:endParaRPr lang="en-US" sz="1250" dirty="0"/>
           </a:p>
@@ -4440,13 +4457,13 @@
       </p:sp>
       <p:sp>
         <p:nvSpPr>
-          <p:cNvPr id="24" name="Text 21"/>
-          <p:cNvSpPr/>
-          <p:nvPr/>
-        </p:nvSpPr>
-        <p:spPr>
-          <a:xfrm>
-            <a:off x="6675120" y="5843016"/>
+          <p:cNvPr id="22" name="Text 19"/>
+          <p:cNvSpPr/>
+          <p:nvPr/>
+        </p:nvSpPr>
+        <p:spPr>
+          <a:xfrm>
+            <a:off x="6675120" y="5184648"/>
             <a:ext cx="4709160" cy="182880"/>
           </a:xfrm>
           <a:prstGeom prst="rect">
@@ -4471,7 +4488,7 @@
                 <a:ea typeface="Calibri" pitchFamily="34" charset="-122"/>
                 <a:cs typeface="Calibri" pitchFamily="34" charset="-120"/>
               </a:rPr>
-              <a:t>OUTLIERS</a:t>
+              <a:t>FEATURE SPLIT</a:t>
             </a:r>
             <a:endParaRPr lang="en-US" sz="1000" dirty="0"/>
           </a:p>
@@ -4479,13 +4496,13 @@
       </p:sp>
       <p:sp>
         <p:nvSpPr>
-          <p:cNvPr id="25" name="Text 22"/>
-          <p:cNvSpPr/>
-          <p:nvPr/>
-        </p:nvSpPr>
-        <p:spPr>
-          <a:xfrm>
-            <a:off x="6675120" y="6035040"/>
+          <p:cNvPr id="23" name="Text 20"/>
+          <p:cNvSpPr/>
+          <p:nvPr/>
+        </p:nvSpPr>
+        <p:spPr>
+          <a:xfrm>
+            <a:off x="6675120" y="5376672"/>
             <a:ext cx="4709160" cy="283464"/>
           </a:xfrm>
           <a:prstGeom prst="rect">
@@ -4513,6 +4530,87 @@
                 <a:ea typeface="Calibri" pitchFamily="34" charset="-122"/>
                 <a:cs typeface="Calibri" pitchFamily="34" charset="-120"/>
               </a:rPr>
+              <a:t>5 numerical, 26 categorical</a:t>
+            </a:r>
+            <a:endParaRPr lang="en-US" sz="1250" dirty="0"/>
+          </a:p>
+        </p:txBody>
+      </p:sp>
+      <p:sp>
+        <p:nvSpPr>
+          <p:cNvPr id="24" name="Text 21"/>
+          <p:cNvSpPr/>
+          <p:nvPr/>
+        </p:nvSpPr>
+        <p:spPr>
+          <a:xfrm>
+            <a:off x="6675120" y="5843016"/>
+            <a:ext cx="4709160" cy="182880"/>
+          </a:xfrm>
+          <a:prstGeom prst="rect">
+            <a:avLst/>
+          </a:prstGeom>
+          <a:noFill/>
+          <a:ln/>
+        </p:spPr>
+        <p:txBody>
+          <a:bodyPr wrap="square" lIns="0" tIns="0" rIns="0" bIns="0" rtlCol="0" anchor="ctr"/>
+          <a:lstStyle/>
+          <a:p>
+            <a:pPr marL="0" indent="0">
+              <a:buNone/>
+            </a:pPr>
+            <a:r>
+              <a:rPr lang="en-US" sz="1000" b="1" kern="0" spc="80" dirty="0">
+                <a:solidFill>
+                  <a:srgbClr val="CADCFC"/>
+                </a:solidFill>
+                <a:latin typeface="Calibri" pitchFamily="34" charset="0"/>
+                <a:ea typeface="Calibri" pitchFamily="34" charset="-122"/>
+                <a:cs typeface="Calibri" pitchFamily="34" charset="-120"/>
+              </a:rPr>
+              <a:t>OUTLIERS</a:t>
+            </a:r>
+            <a:endParaRPr lang="en-US" sz="1000" dirty="0"/>
+          </a:p>
+        </p:txBody>
+      </p:sp>
+      <p:sp>
+        <p:nvSpPr>
+          <p:cNvPr id="25" name="Text 22"/>
+          <p:cNvSpPr/>
+          <p:nvPr/>
+        </p:nvSpPr>
+        <p:spPr>
+          <a:xfrm>
+            <a:off x="6675120" y="6035040"/>
+            <a:ext cx="4709160" cy="283464"/>
+          </a:xfrm>
+          <a:prstGeom prst="rect">
+            <a:avLst/>
+          </a:prstGeom>
+          <a:noFill/>
+          <a:ln/>
+        </p:spPr>
+        <p:txBody>
+          <a:bodyPr wrap="square" lIns="0" tIns="0" rIns="0" bIns="0" rtlCol="0" anchor="ctr"/>
+          <a:lstStyle/>
+          <a:p>
+            <a:pPr marL="0" indent="0">
+              <a:lnSpc>
+                <a:spcPct val="108000"/>
+              </a:lnSpc>
+              <a:buNone/>
+            </a:pPr>
+            <a:r>
+              <a:rPr lang="en-US" sz="1250" dirty="0">
+                <a:solidFill>
+                  <a:srgbClr val="FFFFFF"/>
+                </a:solidFill>
+                <a:latin typeface="Calibri" pitchFamily="34" charset="0"/>
+                <a:ea typeface="Calibri" pitchFamily="34" charset="-122"/>
+                <a:cs typeface="Calibri" pitchFamily="34" charset="-120"/>
+              </a:rPr>
               <a:t>Number of Engines has implausible values (0 or very high)</a:t>
             </a:r>
             <a:endParaRPr lang="en-US" sz="1250" dirty="0"/>
@@ -4558,6 +4656,36 @@
           </a:p>
         </p:txBody>
       </p:sp>
+      <p:pic>
+        <p:nvPicPr>
+          <p:cNvPr id="27" name="Picture 26">
+            <a:extLst>
+              <a:ext uri="{FF2B5EF4-FFF2-40B4-BE49-F238E27FC236}">
+                <a16:creationId xmlns:a16="http://schemas.microsoft.com/office/drawing/2014/main" id="{6B1A3D43-3410-3238-C85C-66B7E1019575}"/>
+              </a:ext>
+            </a:extLst>
+          </p:cNvPr>
+          <p:cNvPicPr>
+            <a:picLocks noChangeAspect="1"/>
+          </p:cNvPicPr>
+          <p:nvPr/>
+        </p:nvPicPr>
+        <p:blipFill>
+          <a:blip r:embed="rId4"/>
+          <a:stretch>
+            <a:fillRect/>
+          </a:stretch>
+        </p:blipFill>
+        <p:spPr>
+          <a:xfrm>
+            <a:off x="9787813" y="2413304"/>
+            <a:ext cx="1870788" cy="1048315"/>
+          </a:xfrm>
+          <a:prstGeom prst="rect">
+            <a:avLst/>
+          </a:prstGeom>
+        </p:spPr>
+      </p:pic>
     </p:spTree>
   </p:cSld>
   <p:clrMapOvr>
@@ -5244,71 +5372,9 @@
                 <a:ea typeface="Calibri" pitchFamily="34" charset="-122"/>
                 <a:cs typeface="Calibri" pitchFamily="34" charset="-120"/>
               </a:rPr>
-              <a:t>Weather in Szeged, Hungary, 2006–2016 (Kaggle)</a:t>
-            </a:r>
-            <a:endParaRPr lang="en-US" sz="1250" dirty="0"/>
-          </a:p>
-        </p:txBody>
-      </p:sp>
-      <p:sp>
-        <p:nvSpPr>
-          <p:cNvPr id="18" name="Text 15"/>
-          <p:cNvSpPr/>
-          <p:nvPr/>
-        </p:nvSpPr>
-        <p:spPr>
-          <a:xfrm>
-            <a:off x="6675120" y="3639312"/>
-            <a:ext cx="4709160" cy="182880"/>
-          </a:xfrm>
-          <a:prstGeom prst="rect">
-            <a:avLst/>
-          </a:prstGeom>
-          <a:noFill/>
-          <a:ln/>
-        </p:spPr>
-        <p:txBody>
-          <a:bodyPr wrap="square" lIns="0" tIns="0" rIns="0" bIns="0" rtlCol="0" anchor="ctr"/>
-          <a:lstStyle/>
-          <a:p>
-            <a:pPr marL="0" indent="0">
-              <a:buNone/>
-            </a:pPr>
-            <a:r>
-              <a:rPr lang="en-US" sz="1000" b="1" kern="0" spc="80" dirty="0">
-                <a:solidFill>
-                  <a:srgbClr val="CADCFC"/>
-                </a:solidFill>
-                <a:latin typeface="Calibri" pitchFamily="34" charset="0"/>
-                <a:ea typeface="Calibri" pitchFamily="34" charset="-122"/>
-                <a:cs typeface="Calibri" pitchFamily="34" charset="-120"/>
-              </a:rPr>
-              <a:t>SIZE</a:t>
-            </a:r>
-            <a:endParaRPr lang="en-US" sz="1000" dirty="0"/>
-          </a:p>
-        </p:txBody>
-      </p:sp>
-      <p:sp>
-        <p:nvSpPr>
-          <p:cNvPr id="19" name="Text 16"/>
-          <p:cNvSpPr/>
-          <p:nvPr/>
-        </p:nvSpPr>
-        <p:spPr>
-          <a:xfrm>
-            <a:off x="6675120" y="3831336"/>
-            <a:ext cx="4709160" cy="283464"/>
-          </a:xfrm>
-          <a:prstGeom prst="rect">
-            <a:avLst/>
-          </a:prstGeom>
-          <a:noFill/>
-          <a:ln/>
-        </p:spPr>
-        <p:txBody>
-          <a:bodyPr wrap="square" lIns="0" tIns="0" rIns="0" bIns="0" rtlCol="0" anchor="ctr"/>
-          <a:lstStyle/>
+              <a:t>Weather in Szeged, Hungary, 2006–2016</a:t>
+            </a:r>
+          </a:p>
           <a:p>
             <a:pPr marL="0" indent="0">
               <a:lnSpc>
@@ -5325,7 +5391,7 @@
                 <a:ea typeface="Calibri" pitchFamily="34" charset="-122"/>
                 <a:cs typeface="Calibri" pitchFamily="34" charset="-120"/>
               </a:rPr>
-              <a:t>96.5k rows × 12 cols → cleaned to 96,429 × 11</a:t>
+              <a:t>(Kaggle)</a:t>
             </a:r>
             <a:endParaRPr lang="en-US" sz="1250" dirty="0"/>
           </a:p>
@@ -5333,13 +5399,13 @@
       </p:sp>
       <p:sp>
         <p:nvSpPr>
-          <p:cNvPr id="20" name="Text 17"/>
-          <p:cNvSpPr/>
-          <p:nvPr/>
-        </p:nvSpPr>
-        <p:spPr>
-          <a:xfrm>
-            <a:off x="6675120" y="4297680"/>
+          <p:cNvPr id="18" name="Text 15"/>
+          <p:cNvSpPr/>
+          <p:nvPr/>
+        </p:nvSpPr>
+        <p:spPr>
+          <a:xfrm>
+            <a:off x="6675120" y="3639312"/>
             <a:ext cx="4709160" cy="182880"/>
           </a:xfrm>
           <a:prstGeom prst="rect">
@@ -5364,7 +5430,7 @@
                 <a:ea typeface="Calibri" pitchFamily="34" charset="-122"/>
                 <a:cs typeface="Calibri" pitchFamily="34" charset="-120"/>
               </a:rPr>
-              <a:t>MISSING VALUES</a:t>
+              <a:t>SIZE</a:t>
             </a:r>
             <a:endParaRPr lang="en-US" sz="1000" dirty="0"/>
           </a:p>
@@ -5372,13 +5438,13 @@
       </p:sp>
       <p:sp>
         <p:nvSpPr>
-          <p:cNvPr id="21" name="Text 18"/>
-          <p:cNvSpPr/>
-          <p:nvPr/>
-        </p:nvSpPr>
-        <p:spPr>
-          <a:xfrm>
-            <a:off x="6675120" y="4489704"/>
+          <p:cNvPr id="19" name="Text 16"/>
+          <p:cNvSpPr/>
+          <p:nvPr/>
+        </p:nvSpPr>
+        <p:spPr>
+          <a:xfrm>
+            <a:off x="6675120" y="3831336"/>
             <a:ext cx="4709160" cy="283464"/>
           </a:xfrm>
           <a:prstGeom prst="rect">
@@ -5406,7 +5472,7 @@
                 <a:ea typeface="Calibri" pitchFamily="34" charset="-122"/>
                 <a:cs typeface="Calibri" pitchFamily="34" charset="-120"/>
               </a:rPr>
-              <a:t>517 nulls in Precip Type; all other columns complete</a:t>
+              <a:t>96.5k rows × 12 cols → cleaned to 96,429 × 11</a:t>
             </a:r>
             <a:endParaRPr lang="en-US" sz="1250" dirty="0"/>
           </a:p>
@@ -5414,13 +5480,13 @@
       </p:sp>
       <p:sp>
         <p:nvSpPr>
-          <p:cNvPr id="22" name="Text 19"/>
-          <p:cNvSpPr/>
-          <p:nvPr/>
-        </p:nvSpPr>
-        <p:spPr>
-          <a:xfrm>
-            <a:off x="6675120" y="4956048"/>
+          <p:cNvPr id="20" name="Text 17"/>
+          <p:cNvSpPr/>
+          <p:nvPr/>
+        </p:nvSpPr>
+        <p:spPr>
+          <a:xfrm>
+            <a:off x="6675120" y="4297680"/>
             <a:ext cx="4709160" cy="182880"/>
           </a:xfrm>
           <a:prstGeom prst="rect">
@@ -5445,7 +5511,7 @@
                 <a:ea typeface="Calibri" pitchFamily="34" charset="-122"/>
                 <a:cs typeface="Calibri" pitchFamily="34" charset="-120"/>
               </a:rPr>
-              <a:t>FEATURE SPLIT</a:t>
+              <a:t>MISSING VALUES</a:t>
             </a:r>
             <a:endParaRPr lang="en-US" sz="1000" dirty="0"/>
           </a:p>
@@ -5453,13 +5519,13 @@
       </p:sp>
       <p:sp>
         <p:nvSpPr>
-          <p:cNvPr id="23" name="Text 20"/>
-          <p:cNvSpPr/>
-          <p:nvPr/>
-        </p:nvSpPr>
-        <p:spPr>
-          <a:xfrm>
-            <a:off x="6675120" y="5148072"/>
+          <p:cNvPr id="21" name="Text 18"/>
+          <p:cNvSpPr/>
+          <p:nvPr/>
+        </p:nvSpPr>
+        <p:spPr>
+          <a:xfrm>
+            <a:off x="6675120" y="4489704"/>
             <a:ext cx="4709160" cy="283464"/>
           </a:xfrm>
           <a:prstGeom prst="rect">
@@ -5487,7 +5553,7 @@
                 <a:ea typeface="Calibri" pitchFamily="34" charset="-122"/>
                 <a:cs typeface="Calibri" pitchFamily="34" charset="-120"/>
               </a:rPr>
-              <a:t>7 numerical, 4 categorical</a:t>
+              <a:t>517 nulls in Precip Type; all other columns complete</a:t>
             </a:r>
             <a:endParaRPr lang="en-US" sz="1250" dirty="0"/>
           </a:p>
@@ -5495,13 +5561,13 @@
       </p:sp>
       <p:sp>
         <p:nvSpPr>
-          <p:cNvPr id="24" name="Text 21"/>
-          <p:cNvSpPr/>
-          <p:nvPr/>
-        </p:nvSpPr>
-        <p:spPr>
-          <a:xfrm>
-            <a:off x="6675120" y="5614416"/>
+          <p:cNvPr id="22" name="Text 19"/>
+          <p:cNvSpPr/>
+          <p:nvPr/>
+        </p:nvSpPr>
+        <p:spPr>
+          <a:xfrm>
+            <a:off x="6675120" y="4956048"/>
             <a:ext cx="4709160" cy="182880"/>
           </a:xfrm>
           <a:prstGeom prst="rect">
@@ -5526,7 +5592,7 @@
                 <a:ea typeface="Calibri" pitchFamily="34" charset="-122"/>
                 <a:cs typeface="Calibri" pitchFamily="34" charset="-120"/>
               </a:rPr>
-              <a:t>OUTLIERS</a:t>
+              <a:t>FEATURE SPLIT</a:t>
             </a:r>
             <a:endParaRPr lang="en-US" sz="1000" dirty="0"/>
           </a:p>
@@ -5534,14 +5600,14 @@
       </p:sp>
       <p:sp>
         <p:nvSpPr>
-          <p:cNvPr id="25" name="Text 22"/>
-          <p:cNvSpPr/>
-          <p:nvPr/>
-        </p:nvSpPr>
-        <p:spPr>
-          <a:xfrm>
-            <a:off x="6675120" y="5806440"/>
-            <a:ext cx="4709160" cy="512064"/>
+          <p:cNvPr id="23" name="Text 20"/>
+          <p:cNvSpPr/>
+          <p:nvPr/>
+        </p:nvSpPr>
+        <p:spPr>
+          <a:xfrm>
+            <a:off x="6675120" y="5148072"/>
+            <a:ext cx="4709160" cy="283464"/>
           </a:xfrm>
           <a:prstGeom prst="rect">
             <a:avLst/>
@@ -5568,6 +5634,87 @@
                 <a:ea typeface="Calibri" pitchFamily="34" charset="-122"/>
                 <a:cs typeface="Calibri" pitchFamily="34" charset="-120"/>
               </a:rPr>
+              <a:t>7 numerical, 4 categorical</a:t>
+            </a:r>
+            <a:endParaRPr lang="en-US" sz="1250" dirty="0"/>
+          </a:p>
+        </p:txBody>
+      </p:sp>
+      <p:sp>
+        <p:nvSpPr>
+          <p:cNvPr id="24" name="Text 21"/>
+          <p:cNvSpPr/>
+          <p:nvPr/>
+        </p:nvSpPr>
+        <p:spPr>
+          <a:xfrm>
+            <a:off x="6675120" y="5614416"/>
+            <a:ext cx="4709160" cy="182880"/>
+          </a:xfrm>
+          <a:prstGeom prst="rect">
+            <a:avLst/>
+          </a:prstGeom>
+          <a:noFill/>
+          <a:ln/>
+        </p:spPr>
+        <p:txBody>
+          <a:bodyPr wrap="square" lIns="0" tIns="0" rIns="0" bIns="0" rtlCol="0" anchor="ctr"/>
+          <a:lstStyle/>
+          <a:p>
+            <a:pPr marL="0" indent="0">
+              <a:buNone/>
+            </a:pPr>
+            <a:r>
+              <a:rPr lang="en-US" sz="1000" b="1" kern="0" spc="80" dirty="0">
+                <a:solidFill>
+                  <a:srgbClr val="CADCFC"/>
+                </a:solidFill>
+                <a:latin typeface="Calibri" pitchFamily="34" charset="0"/>
+                <a:ea typeface="Calibri" pitchFamily="34" charset="-122"/>
+                <a:cs typeface="Calibri" pitchFamily="34" charset="-120"/>
+              </a:rPr>
+              <a:t>OUTLIERS</a:t>
+            </a:r>
+            <a:endParaRPr lang="en-US" sz="1000" dirty="0"/>
+          </a:p>
+        </p:txBody>
+      </p:sp>
+      <p:sp>
+        <p:nvSpPr>
+          <p:cNvPr id="25" name="Text 22"/>
+          <p:cNvSpPr/>
+          <p:nvPr/>
+        </p:nvSpPr>
+        <p:spPr>
+          <a:xfrm>
+            <a:off x="6675120" y="5806440"/>
+            <a:ext cx="4709160" cy="512064"/>
+          </a:xfrm>
+          <a:prstGeom prst="rect">
+            <a:avLst/>
+          </a:prstGeom>
+          <a:noFill/>
+          <a:ln/>
+        </p:spPr>
+        <p:txBody>
+          <a:bodyPr wrap="square" lIns="0" tIns="0" rIns="0" bIns="0" rtlCol="0" anchor="ctr"/>
+          <a:lstStyle/>
+          <a:p>
+            <a:pPr marL="0" indent="0">
+              <a:lnSpc>
+                <a:spcPct val="108000"/>
+              </a:lnSpc>
+              <a:buNone/>
+            </a:pPr>
+            <a:r>
+              <a:rPr lang="en-US" sz="1250" dirty="0">
+                <a:solidFill>
+                  <a:srgbClr val="FFFFFF"/>
+                </a:solidFill>
+                <a:latin typeface="Calibri" pitchFamily="34" charset="0"/>
+                <a:ea typeface="Calibri" pitchFamily="34" charset="-122"/>
+                <a:cs typeface="Calibri" pitchFamily="34" charset="-120"/>
+              </a:rPr>
               <a:t>Humidity/Pressure = 0 treated as sensor error; high wind speeds capped, not dropped</a:t>
             </a:r>
             <a:endParaRPr lang="en-US" sz="1250" dirty="0"/>
@@ -5613,6 +5760,36 @@
           </a:p>
         </p:txBody>
       </p:sp>
+      <p:pic>
+        <p:nvPicPr>
+          <p:cNvPr id="27" name="Picture 26">
+            <a:extLst>
+              <a:ext uri="{FF2B5EF4-FFF2-40B4-BE49-F238E27FC236}">
+                <a16:creationId xmlns:a16="http://schemas.microsoft.com/office/drawing/2014/main" id="{B03580B7-2CED-5F74-B0BA-D6A4AAE687C1}"/>
+              </a:ext>
+            </a:extLst>
+          </p:cNvPr>
+          <p:cNvPicPr>
+            <a:picLocks noChangeAspect="1"/>
+          </p:cNvPicPr>
+          <p:nvPr/>
+        </p:nvPicPr>
+        <p:blipFill>
+          <a:blip r:embed="rId4"/>
+          <a:stretch>
+            <a:fillRect/>
+          </a:stretch>
+        </p:blipFill>
+        <p:spPr>
+          <a:xfrm>
+            <a:off x="9667185" y="2428494"/>
+            <a:ext cx="1981889" cy="1196340"/>
+          </a:xfrm>
+          <a:prstGeom prst="rect">
+            <a:avLst/>
+          </a:prstGeom>
+        </p:spPr>
+      </p:pic>
     </p:spTree>
   </p:cSld>
   <p:clrMapOvr>

--- a/Projects/Capstone Project/1. Lightning Talk #1/capstone_lightning_talk.pptx
+++ b/Projects/Capstone Project/1. Lightning Talk #1/capstone_lightning_talk.pptx
@@ -270,6 +270,13 @@
           </p:nvPr>
         </p:nvSpPr>
         <p:spPr/>
+        <p:txBody>
+          <a:bodyPr/>
+          <a:lstStyle/>
+          <a:p>
+            <a:endParaRPr lang="en-US"/>
+          </a:p>
+        </p:txBody>
       </p:sp>
       <p:sp>
         <p:nvSpPr>
@@ -354,6 +361,13 @@
           </p:nvPr>
         </p:nvSpPr>
         <p:spPr/>
+        <p:txBody>
+          <a:bodyPr/>
+          <a:lstStyle/>
+          <a:p>
+            <a:endParaRPr lang="en-US"/>
+          </a:p>
+        </p:txBody>
       </p:sp>
       <p:sp>
         <p:nvSpPr>
@@ -438,6 +452,13 @@
           </p:nvPr>
         </p:nvSpPr>
         <p:spPr/>
+        <p:txBody>
+          <a:bodyPr/>
+          <a:lstStyle/>
+          <a:p>
+            <a:endParaRPr lang="en-US"/>
+          </a:p>
+        </p:txBody>
       </p:sp>
       <p:sp>
         <p:nvSpPr>
@@ -522,6 +543,13 @@
           </p:nvPr>
         </p:nvSpPr>
         <p:spPr/>
+        <p:txBody>
+          <a:bodyPr/>
+          <a:lstStyle/>
+          <a:p>
+            <a:endParaRPr lang="en-US"/>
+          </a:p>
+        </p:txBody>
       </p:sp>
       <p:sp>
         <p:nvSpPr>
@@ -606,6 +634,13 @@
           </p:nvPr>
         </p:nvSpPr>
         <p:spPr/>
+        <p:txBody>
+          <a:bodyPr/>
+          <a:lstStyle/>
+          <a:p>
+            <a:endParaRPr lang="en-US"/>
+          </a:p>
+        </p:txBody>
       </p:sp>
       <p:sp>
         <p:nvSpPr>
@@ -690,6 +725,13 @@
           </p:nvPr>
         </p:nvSpPr>
         <p:spPr/>
+        <p:txBody>
+          <a:bodyPr/>
+          <a:lstStyle/>
+          <a:p>
+            <a:endParaRPr lang="en-US"/>
+          </a:p>
+        </p:txBody>
       </p:sp>
       <p:sp>
         <p:nvSpPr>
@@ -1143,7 +1185,7 @@
                 <a:ea typeface="Calibri" pitchFamily="34" charset="-122"/>
                 <a:cs typeface="Calibri" pitchFamily="34" charset="-120"/>
               </a:rPr>
-              <a:t>DATA SCIENCE CAPSTONE · LT #1</a:t>
+              <a:t>DATA SCIENCE BOOTCAMP CAPSTONE </a:t>
             </a:r>
             <a:endParaRPr lang="en-US" sz="1400" dirty="0"/>
           </a:p>
@@ -1363,12 +1405,42 @@
                 <a:ea typeface="Calibri" pitchFamily="34" charset="-122"/>
                 <a:cs typeface="Calibri" pitchFamily="34" charset="-120"/>
               </a:rPr>
-              <a:t>Qaem Albaqal</a:t>
+              <a:t>Qaem Albaqal – DSB – 2</a:t>
             </a:r>
             <a:endParaRPr lang="en-US" sz="1600" dirty="0"/>
           </a:p>
         </p:txBody>
       </p:sp>
+      <p:pic>
+        <p:nvPicPr>
+          <p:cNvPr id="26" name="Picture 25" descr="General Assembly Logo PNG Vectors Free Download">
+            <a:extLst>
+              <a:ext uri="{FF2B5EF4-FFF2-40B4-BE49-F238E27FC236}">
+                <a16:creationId xmlns:a16="http://schemas.microsoft.com/office/drawing/2014/main" id="{61F90A25-1A1D-CF8B-8F53-1330494F72A1}"/>
+              </a:ext>
+            </a:extLst>
+          </p:cNvPr>
+          <p:cNvPicPr>
+            <a:picLocks noChangeAspect="1"/>
+          </p:cNvPicPr>
+          <p:nvPr/>
+        </p:nvPicPr>
+        <p:blipFill>
+          <a:blip r:embed="rId3"/>
+          <a:stretch>
+            <a:fillRect/>
+          </a:stretch>
+        </p:blipFill>
+        <p:spPr>
+          <a:xfrm>
+            <a:off x="11059391" y="5725391"/>
+            <a:ext cx="1132609" cy="1132609"/>
+          </a:xfrm>
+          <a:prstGeom prst="rect">
+            <a:avLst/>
+          </a:prstGeom>
+        </p:spPr>
+      </p:pic>
     </p:spTree>
   </p:cSld>
   <p:clrMapOvr>
@@ -1882,7 +1954,29 @@
                 <a:ea typeface="Calibri" pitchFamily="34" charset="-122"/>
                 <a:cs typeface="Calibri" pitchFamily="34" charset="-120"/>
               </a:rPr>
-              <a:t>Engineer features: rolling 5-cycle sensor averages, engine wear-stage bins, compressor thermal ratio</a:t>
+              <a:t>R</a:t>
+            </a:r>
+            <a:r>
+              <a:rPr lang="en-US" sz="1300">
+                <a:solidFill>
+                  <a:srgbClr val="2B2B38"/>
+                </a:solidFill>
+                <a:latin typeface="Calibri" pitchFamily="34" charset="0"/>
+                <a:ea typeface="Calibri" pitchFamily="34" charset="-122"/>
+                <a:cs typeface="Calibri" pitchFamily="34" charset="-120"/>
+              </a:rPr>
+              <a:t>olling </a:t>
+            </a:r>
+            <a:r>
+              <a:rPr lang="en-US" sz="1300" dirty="0">
+                <a:solidFill>
+                  <a:srgbClr val="2B2B38"/>
+                </a:solidFill>
+                <a:latin typeface="Calibri" pitchFamily="34" charset="0"/>
+                <a:ea typeface="Calibri" pitchFamily="34" charset="-122"/>
+                <a:cs typeface="Calibri" pitchFamily="34" charset="-120"/>
+              </a:rPr>
+              <a:t>5-cycle sensor averages, engine wear-stage bins, compressor thermal ratio</a:t>
             </a:r>
             <a:endParaRPr lang="en-US" sz="1300" dirty="0"/>
           </a:p>
@@ -2098,7 +2192,7 @@
                 <a:ea typeface="Calibri" pitchFamily="34" charset="-122"/>
                 <a:cs typeface="Calibri" pitchFamily="34" charset="-120"/>
               </a:rPr>
-              <a:t>(FD001, Kaggle)</a:t>
+              <a:t>(FD001-train, Kaggle)</a:t>
             </a:r>
             <a:endParaRPr lang="en-US" sz="1250" dirty="0"/>
           </a:p>
@@ -3658,7 +3752,7 @@
         </p:blipFill>
         <p:spPr>
           <a:xfrm>
-            <a:off x="532638" y="459486"/>
+            <a:off x="532638" y="417922"/>
             <a:ext cx="534924" cy="534924"/>
           </a:xfrm>
           <a:prstGeom prst="rect">
@@ -5858,7 +5952,7 @@
         </p:nvSpPr>
         <p:spPr>
           <a:xfrm>
-            <a:off x="548640" y="411480"/>
+            <a:off x="538249" y="1322139"/>
             <a:ext cx="4572000" cy="320040"/>
           </a:xfrm>
           <a:prstGeom prst="rect">
@@ -5897,7 +5991,7 @@
         </p:nvSpPr>
         <p:spPr>
           <a:xfrm>
-            <a:off x="548640" y="713232"/>
+            <a:off x="538249" y="1779546"/>
             <a:ext cx="9144000" cy="548640"/>
           </a:xfrm>
           <a:prstGeom prst="rect">
@@ -5936,13 +6030,13 @@
           <p:nvPr>
             <p:extLst>
               <p:ext uri="{D42A27DB-BD31-4B8C-83A1-F6EECF244321}">
-                <p14:modId xmlns:p14="http://schemas.microsoft.com/office/powerpoint/2010/main" val="1579011935"/>
+                <p14:modId xmlns:p14="http://schemas.microsoft.com/office/powerpoint/2010/main" val="4163201951"/>
               </p:ext>
             </p:extLst>
           </p:nvPr>
         </p:nvGraphicFramePr>
         <p:xfrm>
-          <a:off x="548640" y="1508760"/>
+          <a:off x="563880" y="2423160"/>
           <a:ext cx="11064240" cy="2011680"/>
         </p:xfrm>
         <a:graphic>
@@ -6900,115 +6994,6 @@
       </p:graphicFrame>
       <p:sp>
         <p:nvSpPr>
-          <p:cNvPr id="8" name="Text 5"/>
-          <p:cNvSpPr/>
-          <p:nvPr/>
-        </p:nvSpPr>
-        <p:spPr>
-          <a:xfrm>
-            <a:off x="640080" y="5241005"/>
-            <a:ext cx="4937760" cy="274320"/>
-          </a:xfrm>
-          <a:prstGeom prst="rect">
-            <a:avLst/>
-          </a:prstGeom>
-          <a:noFill/>
-          <a:ln/>
-        </p:spPr>
-        <p:txBody>
-          <a:bodyPr wrap="square" lIns="0" tIns="0" rIns="0" bIns="0" rtlCol="0" anchor="ctr"/>
-          <a:lstStyle/>
-          <a:p>
-            <a:pPr marL="0" indent="0">
-              <a:buNone/>
-            </a:pPr>
-            <a:r>
-              <a:rPr lang="en-US" sz="1200" b="1" kern="0" spc="150" dirty="0">
-                <a:solidFill>
-                  <a:srgbClr val="E8A33D"/>
-                </a:solidFill>
-                <a:latin typeface="Calibri" pitchFamily="34" charset="0"/>
-                <a:ea typeface="Calibri" pitchFamily="34" charset="-122"/>
-                <a:cs typeface="Calibri" pitchFamily="34" charset="-120"/>
-              </a:rPr>
-              <a:t>REMINDERS</a:t>
-            </a:r>
-            <a:endParaRPr lang="en-US" sz="1200" dirty="0"/>
-          </a:p>
-        </p:txBody>
-      </p:sp>
-      <p:sp>
-        <p:nvSpPr>
-          <p:cNvPr id="9" name="Text 6"/>
-          <p:cNvSpPr/>
-          <p:nvPr/>
-        </p:nvSpPr>
-        <p:spPr>
-          <a:xfrm>
-            <a:off x="548640" y="5561045"/>
-            <a:ext cx="5120640" cy="673670"/>
-          </a:xfrm>
-          <a:prstGeom prst="rect">
-            <a:avLst/>
-          </a:prstGeom>
-          <a:noFill/>
-          <a:ln/>
-        </p:spPr>
-        <p:txBody>
-          <a:bodyPr wrap="square" lIns="0" tIns="0" rIns="0" bIns="0" rtlCol="0" anchor="t"/>
-          <a:lstStyle/>
-          <a:p>
-            <a:pPr marL="177800" indent="-177800">
-              <a:lnSpc>
-                <a:spcPct val="108000"/>
-              </a:lnSpc>
-              <a:spcAft>
-                <a:spcPts val="800"/>
-              </a:spcAft>
-              <a:buSzPct val="100000"/>
-              <a:buChar char="•"/>
-            </a:pPr>
-            <a:r>
-              <a:rPr lang="en-US" sz="1350" dirty="0">
-                <a:solidFill>
-                  <a:srgbClr val="CADCFC"/>
-                </a:solidFill>
-                <a:latin typeface="Calibri" pitchFamily="34" charset="0"/>
-                <a:ea typeface="Calibri" pitchFamily="34" charset="-122"/>
-                <a:cs typeface="Calibri" pitchFamily="34" charset="-120"/>
-              </a:rPr>
-              <a:t>Each dataset needs 15k+ rows and 10+ columns — all four topics</a:t>
-            </a:r>
-            <a:endParaRPr lang="en-US" sz="1350" dirty="0"/>
-          </a:p>
-          <a:p>
-            <a:pPr marL="177800" indent="-177800">
-              <a:lnSpc>
-                <a:spcPct val="108000"/>
-              </a:lnSpc>
-              <a:spcAft>
-                <a:spcPts val="800"/>
-              </a:spcAft>
-              <a:buSzPct val="100000"/>
-              <a:buChar char="•"/>
-            </a:pPr>
-            <a:r>
-              <a:rPr lang="en-US" sz="1350" dirty="0">
-                <a:solidFill>
-                  <a:srgbClr val="CADCFC"/>
-                </a:solidFill>
-                <a:latin typeface="Calibri" pitchFamily="34" charset="0"/>
-                <a:ea typeface="Calibri" pitchFamily="34" charset="-122"/>
-                <a:cs typeface="Calibri" pitchFamily="34" charset="-120"/>
-              </a:rPr>
-              <a:t>No text-based datasets — all four use structured/tabular data</a:t>
-            </a:r>
-            <a:endParaRPr lang="en-US" sz="1350" dirty="0"/>
-          </a:p>
-        </p:txBody>
-      </p:sp>
-      <p:sp>
-        <p:nvSpPr>
           <p:cNvPr id="10" name="Text 7"/>
           <p:cNvSpPr/>
           <p:nvPr/>
@@ -7043,6 +7028,73 @@
               <a:t>06 / 06</a:t>
             </a:r>
             <a:endParaRPr lang="en-US" sz="900" dirty="0"/>
+          </a:p>
+        </p:txBody>
+      </p:sp>
+      <p:sp>
+        <p:nvSpPr>
+          <p:cNvPr id="12" name="Text 17">
+            <a:extLst>
+              <a:ext uri="{FF2B5EF4-FFF2-40B4-BE49-F238E27FC236}">
+                <a16:creationId xmlns:a16="http://schemas.microsoft.com/office/drawing/2014/main" id="{3F878DE1-C420-2060-F7EE-F24BECBC84DF}"/>
+              </a:ext>
+            </a:extLst>
+          </p:cNvPr>
+          <p:cNvSpPr/>
+          <p:nvPr/>
+        </p:nvSpPr>
+        <p:spPr>
+          <a:xfrm>
+            <a:off x="648391" y="6078266"/>
+            <a:ext cx="4671753" cy="459694"/>
+          </a:xfrm>
+          <a:prstGeom prst="rect">
+            <a:avLst/>
+          </a:prstGeom>
+          <a:noFill/>
+          <a:ln/>
+        </p:spPr>
+        <p:txBody>
+          <a:bodyPr wrap="square" lIns="0" tIns="0" rIns="0" bIns="0" rtlCol="0" anchor="ctr"/>
+          <a:lstStyle/>
+          <a:p>
+            <a:pPr marL="0" indent="0">
+              <a:buNone/>
+            </a:pPr>
+            <a:r>
+              <a:rPr lang="en-US" sz="1600" dirty="0">
+                <a:solidFill>
+                  <a:srgbClr val="CADCFC"/>
+                </a:solidFill>
+                <a:latin typeface="Calibri" pitchFamily="34" charset="0"/>
+                <a:ea typeface="Calibri" pitchFamily="34" charset="-122"/>
+                <a:cs typeface="Calibri" pitchFamily="34" charset="-120"/>
+              </a:rPr>
+              <a:t>Special Thanks for my lead instructor, Hussain Amer and the IA’s Jubran and Fatema Alghallaf. Also, thanks for </a:t>
+            </a:r>
+            <a:r>
+              <a:rPr lang="en-US" sz="1600" dirty="0" err="1">
+                <a:solidFill>
+                  <a:srgbClr val="CADCFC"/>
+                </a:solidFill>
+                <a:latin typeface="Calibri" pitchFamily="34" charset="0"/>
+                <a:ea typeface="Calibri" pitchFamily="34" charset="-122"/>
+                <a:cs typeface="Calibri" pitchFamily="34" charset="-120"/>
+              </a:rPr>
+              <a:t>ms.Esraa</a:t>
+            </a:r>
+            <a:r>
+              <a:rPr lang="en-US" sz="1600" dirty="0">
+                <a:solidFill>
+                  <a:srgbClr val="CADCFC"/>
+                </a:solidFill>
+                <a:latin typeface="Calibri" pitchFamily="34" charset="0"/>
+                <a:ea typeface="Calibri" pitchFamily="34" charset="-122"/>
+                <a:cs typeface="Calibri" pitchFamily="34" charset="-120"/>
+              </a:rPr>
+              <a:t> Haji from our guest audience</a:t>
+            </a:r>
+            <a:endParaRPr lang="en-US" sz="1600" dirty="0"/>
           </a:p>
         </p:txBody>
       </p:sp>
